--- a/media/resources/files/ButunSandardyJanaOnduktardyKoboytuuBoluu-10-100-1000-KonuguuA.pptx
+++ b/media/resources/files/ButunSandardyJanaOnduktardyKoboytuuBoluu-10-100-1000-KonuguuA.pptx
@@ -15514,7 +15514,7 @@
                 <a:ea typeface="+mn-ea"/>
                 <a:cs typeface="+mn-cs"/>
               </a:rPr>
-              <a:t>Турдуу пикирлер учун ыраазычылык билдиребиз.</a:t>
+              <a:t>Түрдүү пикирлер үчүн ыраазычылык билдиребиз.</a:t>
             </a:r>
           </a:p>
           <a:p>

--- a/media/resources/files/ButunSandardyJanaOnduktardyKoboytuuBoluu-10-100-1000-KonuguuA.pptx
+++ b/media/resources/files/ButunSandardyJanaOnduktardyKoboytuuBoluu-10-100-1000-KonuguuA.pptx
@@ -1759,7 +1759,7 @@
                           <a:ea typeface="+mn-ea"/>
                           <a:cs typeface="+mn-cs"/>
                         </a:rPr>
-                        <a:t>0.8</a:t>
+                        <a:t>0,8</a:t>
                       </a:r>
                     </a:p>
                   </a:txBody>
@@ -2021,7 +2021,7 @@
                           <a:ea typeface="+mn-ea"/>
                           <a:cs typeface="+mn-cs"/>
                         </a:rPr>
-                        <a:t>0.52</a:t>
+                        <a:t>0,52</a:t>
                       </a:r>
                     </a:p>
                   </a:txBody>
@@ -2283,7 +2283,7 @@
                           <a:ea typeface="+mn-ea"/>
                           <a:cs typeface="+mn-cs"/>
                         </a:rPr>
-                        <a:t>6.1</a:t>
+                        <a:t>6,1</a:t>
                       </a:r>
                     </a:p>
                   </a:txBody>
@@ -2375,7 +2375,7 @@
                           <a:ea typeface="+mn-ea"/>
                           <a:cs typeface="+mn-cs"/>
                         </a:rPr>
-                        <a:t>7.3</a:t>
+                        <a:t>7,3</a:t>
                       </a:r>
                     </a:p>
                   </a:txBody>
@@ -2545,7 +2545,7 @@
                           <a:ea typeface="+mn-ea"/>
                           <a:cs typeface="+mn-cs"/>
                         </a:rPr>
-                        <a:t>0.0073</a:t>
+                        <a:t>0,0073</a:t>
                       </a:r>
                     </a:p>
                   </a:txBody>
@@ -2637,7 +2637,7 @@
                           <a:ea typeface="+mn-ea"/>
                           <a:cs typeface="+mn-cs"/>
                         </a:rPr>
-                        <a:t>1.08</a:t>
+                        <a:t>1,08</a:t>
                       </a:r>
                     </a:p>
                   </a:txBody>
@@ -2807,7 +2807,7 @@
                           <a:ea typeface="+mn-ea"/>
                           <a:cs typeface="+mn-cs"/>
                         </a:rPr>
-                        <a:t>0.000108</a:t>
+                        <a:t>0,000108</a:t>
                       </a:r>
                     </a:p>
                   </a:txBody>
@@ -6321,7 +6321,7 @@
                           <a:ea typeface="+mn-ea"/>
                           <a:cs typeface="+mn-cs"/>
                         </a:rPr>
-                        <a:t>0.8</a:t>
+                        <a:t>0,8</a:t>
                       </a:r>
                     </a:p>
                   </a:txBody>
@@ -6583,7 +6583,7 @@
                           <a:ea typeface="+mn-ea"/>
                           <a:cs typeface="+mn-cs"/>
                         </a:rPr>
-                        <a:t>0.52</a:t>
+                        <a:t>0,52</a:t>
                       </a:r>
                     </a:p>
                   </a:txBody>
@@ -6845,7 +6845,7 @@
                           <a:ea typeface="+mn-ea"/>
                           <a:cs typeface="+mn-cs"/>
                         </a:rPr>
-                        <a:t>6.1</a:t>
+                        <a:t>6,1</a:t>
                       </a:r>
                     </a:p>
                   </a:txBody>
@@ -6937,7 +6937,7 @@
                           <a:ea typeface="+mn-ea"/>
                           <a:cs typeface="+mn-cs"/>
                         </a:rPr>
-                        <a:t>7.3</a:t>
+                        <a:t>7,3</a:t>
                       </a:r>
                     </a:p>
                   </a:txBody>
@@ -7107,7 +7107,7 @@
                           <a:ea typeface="+mn-ea"/>
                           <a:cs typeface="+mn-cs"/>
                         </a:rPr>
-                        <a:t>0.0073</a:t>
+                        <a:t>0,0073</a:t>
                       </a:r>
                     </a:p>
                   </a:txBody>
@@ -7199,7 +7199,7 @@
                           <a:ea typeface="+mn-ea"/>
                           <a:cs typeface="+mn-cs"/>
                         </a:rPr>
-                        <a:t>1.08</a:t>
+                        <a:t>1,08</a:t>
                       </a:r>
                     </a:p>
                   </a:txBody>
@@ -7369,7 +7369,7 @@
                           <a:ea typeface="+mn-ea"/>
                           <a:cs typeface="+mn-cs"/>
                         </a:rPr>
-                        <a:t>0.000108</a:t>
+                        <a:t>0,000108</a:t>
                       </a:r>
                     </a:p>
                   </a:txBody>
@@ -10853,7 +10853,7 @@
                           <a:ea typeface="+mn-ea"/>
                           <a:cs typeface="+mn-cs"/>
                         </a:rPr>
-                        <a:t>0.8</a:t>
+                        <a:t>0,8</a:t>
                       </a:r>
                     </a:p>
                   </a:txBody>
@@ -11115,7 +11115,7 @@
                           <a:ea typeface="+mn-ea"/>
                           <a:cs typeface="+mn-cs"/>
                         </a:rPr>
-                        <a:t>0.52</a:t>
+                        <a:t>0,52</a:t>
                       </a:r>
                     </a:p>
                   </a:txBody>
@@ -11377,7 +11377,7 @@
                           <a:ea typeface="+mn-ea"/>
                           <a:cs typeface="+mn-cs"/>
                         </a:rPr>
-                        <a:t>6.1</a:t>
+                        <a:t>6,1</a:t>
                       </a:r>
                     </a:p>
                   </a:txBody>
@@ -11469,7 +11469,7 @@
                           <a:ea typeface="+mn-ea"/>
                           <a:cs typeface="+mn-cs"/>
                         </a:rPr>
-                        <a:t>7.3</a:t>
+                        <a:t>7,3</a:t>
                       </a:r>
                     </a:p>
                   </a:txBody>
@@ -11639,7 +11639,7 @@
                           <a:ea typeface="+mn-ea"/>
                           <a:cs typeface="+mn-cs"/>
                         </a:rPr>
-                        <a:t>0.0073</a:t>
+                        <a:t>0,0073</a:t>
                       </a:r>
                     </a:p>
                   </a:txBody>
@@ -11731,7 +11731,7 @@
                           <a:ea typeface="+mn-ea"/>
                           <a:cs typeface="+mn-cs"/>
                         </a:rPr>
-                        <a:t>1.08</a:t>
+                        <a:t>1,08</a:t>
                       </a:r>
                     </a:p>
                   </a:txBody>
@@ -11901,7 +11901,7 @@
                           <a:ea typeface="+mn-ea"/>
                           <a:cs typeface="+mn-cs"/>
                         </a:rPr>
-                        <a:t>0.000108</a:t>
+                        <a:t>0,000108</a:t>
                       </a:r>
                     </a:p>
                   </a:txBody>

--- a/media/resources/files/ButunSandardyJanaOnduktardyKoboytuuBoluu-10-100-1000-KonuguuA.pptx
+++ b/media/resources/files/ButunSandardyJanaOnduktardyKoboytuuBoluu-10-100-1000-KonuguuA.pptx
@@ -1936,7 +1936,7 @@
                           <a:ea typeface="+mn-ea"/>
                           <a:cs typeface="+mn-cs"/>
                         </a:rPr>
-                        <a:t>52000</a:t>
+                        <a:t>52 000</a:t>
                       </a:r>
                     </a:p>
                   </a:txBody>
@@ -2198,7 +2198,7 @@
                           <a:ea typeface="+mn-ea"/>
                           <a:cs typeface="+mn-cs"/>
                         </a:rPr>
-                        <a:t>61000</a:t>
+                        <a:t>61 000</a:t>
                       </a:r>
                     </a:p>
                   </a:txBody>
@@ -2722,7 +2722,7 @@
                           <a:ea typeface="+mn-ea"/>
                           <a:cs typeface="+mn-cs"/>
                         </a:rPr>
-                        <a:t>10800</a:t>
+                        <a:t>10 800</a:t>
                       </a:r>
                     </a:p>
                   </a:txBody>
@@ -2807,7 +2807,7 @@
                           <a:ea typeface="+mn-ea"/>
                           <a:cs typeface="+mn-cs"/>
                         </a:rPr>
-                        <a:t>0,000108</a:t>
+                        <a:t>0,000 108</a:t>
                       </a:r>
                     </a:p>
                   </a:txBody>
@@ -6498,7 +6498,7 @@
                           <a:ea typeface="+mn-ea"/>
                           <a:cs typeface="+mn-cs"/>
                         </a:rPr>
-                        <a:t>52000</a:t>
+                        <a:t>52 000</a:t>
                       </a:r>
                     </a:p>
                   </a:txBody>
@@ -6760,7 +6760,7 @@
                           <a:ea typeface="+mn-ea"/>
                           <a:cs typeface="+mn-cs"/>
                         </a:rPr>
-                        <a:t>61000</a:t>
+                        <a:t>61 000</a:t>
                       </a:r>
                     </a:p>
                   </a:txBody>
@@ -7284,7 +7284,7 @@
                           <a:ea typeface="+mn-ea"/>
                           <a:cs typeface="+mn-cs"/>
                         </a:rPr>
-                        <a:t>10800</a:t>
+                        <a:t>10 800</a:t>
                       </a:r>
                     </a:p>
                   </a:txBody>
@@ -7369,7 +7369,7 @@
                           <a:ea typeface="+mn-ea"/>
                           <a:cs typeface="+mn-cs"/>
                         </a:rPr>
-                        <a:t>0,000108</a:t>
+                        <a:t>0,000 108</a:t>
                       </a:r>
                     </a:p>
                   </a:txBody>
@@ -11030,7 +11030,7 @@
                           <a:ea typeface="+mn-ea"/>
                           <a:cs typeface="+mn-cs"/>
                         </a:rPr>
-                        <a:t>52000</a:t>
+                        <a:t>52 000</a:t>
                       </a:r>
                     </a:p>
                   </a:txBody>
@@ -11292,7 +11292,7 @@
                           <a:ea typeface="+mn-ea"/>
                           <a:cs typeface="+mn-cs"/>
                         </a:rPr>
-                        <a:t>61000</a:t>
+                        <a:t>61 000</a:t>
                       </a:r>
                     </a:p>
                   </a:txBody>
@@ -11816,7 +11816,7 @@
                           <a:ea typeface="+mn-ea"/>
                           <a:cs typeface="+mn-cs"/>
                         </a:rPr>
-                        <a:t>10800</a:t>
+                        <a:t>10 800</a:t>
                       </a:r>
                     </a:p>
                   </a:txBody>
@@ -11901,7 +11901,7 @@
                           <a:ea typeface="+mn-ea"/>
                           <a:cs typeface="+mn-cs"/>
                         </a:rPr>
-                        <a:t>0,000108</a:t>
+                        <a:t>0,000 108</a:t>
                       </a:r>
                     </a:p>
                   </a:txBody>
